--- a/assets/powerpoints/module-logement/C4-le-bail-et-le-1er-juillet.pptx
+++ b/assets/powerpoints/module-logement/C4-le-bail-et-le-1er-juillet.pptx
@@ -4791,7 +4791,7 @@
                 </a:solidFill>
                 <a:latin typeface="Verdana"/>
               </a:rPr>
-              <a:t>SÉANCE C4  ·  MODULE 8</a:t>
+              <a:t>SÉANCE C4  ·  MODULE 9</a:t>
             </a:r>
           </a:p>
         </p:txBody>

--- a/assets/powerpoints/module-logement/C4-le-bail-et-le-1er-juillet.pptx
+++ b/assets/powerpoints/module-logement/C4-le-bail-et-le-1er-juillet.pptx
@@ -4787,7 +4787,7 @@
             <a:r>
               <a:rPr sz="1300" b="1" i="0" spc="156">
                 <a:solidFill>
-                  <a:srgbClr val="166534"/>
+                  <a:srgbClr val="A5335F"/>
                 </a:solidFill>
                 <a:latin typeface="Verdana"/>
               </a:rPr>
@@ -5127,7 +5127,7 @@
             <a:r>
               <a:rPr sz="1300" b="1" i="0" spc="156">
                 <a:solidFill>
-                  <a:srgbClr val="166534"/>
+                  <a:srgbClr val="A5335F"/>
                 </a:solidFill>
                 <a:latin typeface="Verdana"/>
               </a:rPr>
@@ -5277,7 +5277,7 @@
             </a:avLst>
           </a:prstGeom>
           <a:solidFill>
-            <a:srgbClr val="E3F1E7"/>
+            <a:srgbClr val="FCE9F0"/>
           </a:solidFill>
           <a:ln>
             <a:noFill/>
@@ -5334,7 +5334,7 @@
             <a:r>
               <a:rPr sz="1500" b="1" i="0">
                 <a:solidFill>
-                  <a:srgbClr val="166534"/>
+                  <a:srgbClr val="A5335F"/>
                 </a:solidFill>
                 <a:latin typeface="Verdana"/>
               </a:rPr>
@@ -5445,7 +5445,7 @@
             </a:avLst>
           </a:prstGeom>
           <a:solidFill>
-            <a:srgbClr val="E3F1E7"/>
+            <a:srgbClr val="FCE9F0"/>
           </a:solidFill>
           <a:ln>
             <a:noFill/>
@@ -5502,7 +5502,7 @@
             <a:r>
               <a:rPr sz="1500" b="1" i="0">
                 <a:solidFill>
-                  <a:srgbClr val="166534"/>
+                  <a:srgbClr val="A5335F"/>
                 </a:solidFill>
                 <a:latin typeface="Verdana"/>
               </a:rPr>
@@ -5613,7 +5613,7 @@
             </a:avLst>
           </a:prstGeom>
           <a:solidFill>
-            <a:srgbClr val="E3F1E7"/>
+            <a:srgbClr val="FCE9F0"/>
           </a:solidFill>
           <a:ln>
             <a:noFill/>
@@ -5670,7 +5670,7 @@
             <a:r>
               <a:rPr sz="1500" b="1" i="0">
                 <a:solidFill>
-                  <a:srgbClr val="166534"/>
+                  <a:srgbClr val="A5335F"/>
                 </a:solidFill>
                 <a:latin typeface="Verdana"/>
               </a:rPr>
@@ -5781,7 +5781,7 @@
             </a:avLst>
           </a:prstGeom>
           <a:solidFill>
-            <a:srgbClr val="E3F1E7"/>
+            <a:srgbClr val="FCE9F0"/>
           </a:solidFill>
           <a:ln>
             <a:noFill/>
@@ -5838,7 +5838,7 @@
             <a:r>
               <a:rPr sz="1500" b="1" i="0">
                 <a:solidFill>
-                  <a:srgbClr val="166534"/>
+                  <a:srgbClr val="A5335F"/>
                 </a:solidFill>
                 <a:latin typeface="Verdana"/>
               </a:rPr>
@@ -5949,7 +5949,7 @@
             </a:avLst>
           </a:prstGeom>
           <a:solidFill>
-            <a:srgbClr val="E3F1E7"/>
+            <a:srgbClr val="FCE9F0"/>
           </a:solidFill>
           <a:ln>
             <a:noFill/>
@@ -6006,7 +6006,7 @@
             <a:r>
               <a:rPr sz="1500" b="1" i="0">
                 <a:solidFill>
-                  <a:srgbClr val="166534"/>
+                  <a:srgbClr val="A5335F"/>
                 </a:solidFill>
                 <a:latin typeface="Verdana"/>
               </a:rPr>
@@ -6222,7 +6222,7 @@
             <a:r>
               <a:rPr sz="1300" b="1" i="0" spc="156">
                 <a:solidFill>
-                  <a:srgbClr val="166534"/>
+                  <a:srgbClr val="A5335F"/>
                 </a:solidFill>
                 <a:latin typeface="Verdana"/>
               </a:rPr>
@@ -6372,7 +6372,7 @@
             </a:avLst>
           </a:prstGeom>
           <a:solidFill>
-            <a:srgbClr val="E3F1E7"/>
+            <a:srgbClr val="FCE9F0"/>
           </a:solidFill>
           <a:ln>
             <a:noFill/>
@@ -6429,7 +6429,7 @@
             <a:r>
               <a:rPr sz="1500" b="1" i="0">
                 <a:solidFill>
-                  <a:srgbClr val="166534"/>
+                  <a:srgbClr val="A5335F"/>
                 </a:solidFill>
                 <a:latin typeface="Verdana"/>
               </a:rPr>
@@ -6549,7 +6549,7 @@
             </a:avLst>
           </a:prstGeom>
           <a:solidFill>
-            <a:srgbClr val="E3F1E7"/>
+            <a:srgbClr val="FCE9F0"/>
           </a:solidFill>
           <a:ln>
             <a:noFill/>
@@ -6606,7 +6606,7 @@
             <a:r>
               <a:rPr sz="1500" b="1" i="0">
                 <a:solidFill>
-                  <a:srgbClr val="166534"/>
+                  <a:srgbClr val="A5335F"/>
                 </a:solidFill>
                 <a:latin typeface="Verdana"/>
               </a:rPr>
@@ -6726,7 +6726,7 @@
             </a:avLst>
           </a:prstGeom>
           <a:solidFill>
-            <a:srgbClr val="E3F1E7"/>
+            <a:srgbClr val="FCE9F0"/>
           </a:solidFill>
           <a:ln>
             <a:noFill/>
@@ -6783,7 +6783,7 @@
             <a:r>
               <a:rPr sz="1500" b="1" i="0">
                 <a:solidFill>
-                  <a:srgbClr val="166534"/>
+                  <a:srgbClr val="A5335F"/>
                 </a:solidFill>
                 <a:latin typeface="Verdana"/>
               </a:rPr>
@@ -6903,7 +6903,7 @@
             </a:avLst>
           </a:prstGeom>
           <a:solidFill>
-            <a:srgbClr val="E3F1E7"/>
+            <a:srgbClr val="FCE9F0"/>
           </a:solidFill>
           <a:ln>
             <a:noFill/>
@@ -6960,7 +6960,7 @@
             <a:r>
               <a:rPr sz="1500" b="1" i="0">
                 <a:solidFill>
-                  <a:srgbClr val="166534"/>
+                  <a:srgbClr val="A5335F"/>
                 </a:solidFill>
                 <a:latin typeface="Verdana"/>
               </a:rPr>
@@ -7080,7 +7080,7 @@
             </a:avLst>
           </a:prstGeom>
           <a:solidFill>
-            <a:srgbClr val="E3F1E7"/>
+            <a:srgbClr val="FCE9F0"/>
           </a:solidFill>
           <a:ln>
             <a:noFill/>
@@ -7137,7 +7137,7 @@
             <a:r>
               <a:rPr sz="1500" b="1" i="0">
                 <a:solidFill>
-                  <a:srgbClr val="166534"/>
+                  <a:srgbClr val="A5335F"/>
                 </a:solidFill>
                 <a:latin typeface="Verdana"/>
               </a:rPr>
@@ -7362,7 +7362,7 @@
             <a:r>
               <a:rPr sz="1300" b="1" i="0" spc="156">
                 <a:solidFill>
-                  <a:srgbClr val="166534"/>
+                  <a:srgbClr val="A5335F"/>
                 </a:solidFill>
                 <a:latin typeface="Verdana"/>
               </a:rPr>
@@ -7911,7 +7911,7 @@
             <a:r>
               <a:rPr sz="1300" b="1" i="0" spc="156">
                 <a:solidFill>
-                  <a:srgbClr val="166534"/>
+                  <a:srgbClr val="A5335F"/>
                 </a:solidFill>
                 <a:latin typeface="Verdana"/>
               </a:rPr>
@@ -8460,7 +8460,7 @@
             <a:r>
               <a:rPr sz="1300" b="1" i="0" spc="156">
                 <a:solidFill>
-                  <a:srgbClr val="166534"/>
+                  <a:srgbClr val="A5335F"/>
                 </a:solidFill>
                 <a:latin typeface="Verdana"/>
               </a:rPr>
@@ -8610,7 +8610,7 @@
             </a:avLst>
           </a:prstGeom>
           <a:solidFill>
-            <a:srgbClr val="E3F1E7"/>
+            <a:srgbClr val="FCE9F0"/>
           </a:solidFill>
           <a:ln>
             <a:noFill/>
@@ -8667,7 +8667,7 @@
             <a:r>
               <a:rPr sz="1500" b="1" i="0">
                 <a:solidFill>
-                  <a:srgbClr val="166534"/>
+                  <a:srgbClr val="A5335F"/>
                 </a:solidFill>
                 <a:latin typeface="Verdana"/>
               </a:rPr>
@@ -8778,7 +8778,7 @@
             </a:avLst>
           </a:prstGeom>
           <a:solidFill>
-            <a:srgbClr val="E3F1E7"/>
+            <a:srgbClr val="FCE9F0"/>
           </a:solidFill>
           <a:ln>
             <a:noFill/>
@@ -8835,7 +8835,7 @@
             <a:r>
               <a:rPr sz="1500" b="1" i="0">
                 <a:solidFill>
-                  <a:srgbClr val="166534"/>
+                  <a:srgbClr val="A5335F"/>
                 </a:solidFill>
                 <a:latin typeface="Verdana"/>
               </a:rPr>
@@ -8946,7 +8946,7 @@
             </a:avLst>
           </a:prstGeom>
           <a:solidFill>
-            <a:srgbClr val="E3F1E7"/>
+            <a:srgbClr val="FCE9F0"/>
           </a:solidFill>
           <a:ln>
             <a:noFill/>
@@ -9003,7 +9003,7 @@
             <a:r>
               <a:rPr sz="1500" b="1" i="0">
                 <a:solidFill>
-                  <a:srgbClr val="166534"/>
+                  <a:srgbClr val="A5335F"/>
                 </a:solidFill>
                 <a:latin typeface="Verdana"/>
               </a:rPr>
@@ -9114,7 +9114,7 @@
             </a:avLst>
           </a:prstGeom>
           <a:solidFill>
-            <a:srgbClr val="E3F1E7"/>
+            <a:srgbClr val="FCE9F0"/>
           </a:solidFill>
           <a:ln>
             <a:noFill/>
@@ -9171,7 +9171,7 @@
             <a:r>
               <a:rPr sz="1500" b="1" i="0">
                 <a:solidFill>
-                  <a:srgbClr val="166534"/>
+                  <a:srgbClr val="A5335F"/>
                 </a:solidFill>
                 <a:latin typeface="Verdana"/>
               </a:rPr>
@@ -9282,7 +9282,7 @@
             </a:avLst>
           </a:prstGeom>
           <a:solidFill>
-            <a:srgbClr val="E3F1E7"/>
+            <a:srgbClr val="FCE9F0"/>
           </a:solidFill>
           <a:ln>
             <a:noFill/>
@@ -9339,7 +9339,7 @@
             <a:r>
               <a:rPr sz="1500" b="1" i="0">
                 <a:solidFill>
-                  <a:srgbClr val="166534"/>
+                  <a:srgbClr val="A5335F"/>
                 </a:solidFill>
                 <a:latin typeface="Verdana"/>
               </a:rPr>
@@ -9555,7 +9555,7 @@
             <a:r>
               <a:rPr sz="1300" b="1" i="0" spc="156">
                 <a:solidFill>
-                  <a:srgbClr val="166534"/>
+                  <a:srgbClr val="A5335F"/>
                 </a:solidFill>
                 <a:latin typeface="Verdana"/>
               </a:rPr>
@@ -9705,7 +9705,7 @@
             </a:avLst>
           </a:prstGeom>
           <a:solidFill>
-            <a:srgbClr val="E3F1E7"/>
+            <a:srgbClr val="FCE9F0"/>
           </a:solidFill>
           <a:ln>
             <a:noFill/>
@@ -9762,7 +9762,7 @@
             <a:r>
               <a:rPr sz="1500" b="1" i="0">
                 <a:solidFill>
-                  <a:srgbClr val="166534"/>
+                  <a:srgbClr val="A5335F"/>
                 </a:solidFill>
                 <a:latin typeface="Verdana"/>
               </a:rPr>
@@ -9882,7 +9882,7 @@
             </a:avLst>
           </a:prstGeom>
           <a:solidFill>
-            <a:srgbClr val="E3F1E7"/>
+            <a:srgbClr val="FCE9F0"/>
           </a:solidFill>
           <a:ln>
             <a:noFill/>
@@ -9939,7 +9939,7 @@
             <a:r>
               <a:rPr sz="1500" b="1" i="0">
                 <a:solidFill>
-                  <a:srgbClr val="166534"/>
+                  <a:srgbClr val="A5335F"/>
                 </a:solidFill>
                 <a:latin typeface="Verdana"/>
               </a:rPr>
@@ -10059,7 +10059,7 @@
             </a:avLst>
           </a:prstGeom>
           <a:solidFill>
-            <a:srgbClr val="E3F1E7"/>
+            <a:srgbClr val="FCE9F0"/>
           </a:solidFill>
           <a:ln>
             <a:noFill/>
@@ -10116,7 +10116,7 @@
             <a:r>
               <a:rPr sz="1500" b="1" i="0">
                 <a:solidFill>
-                  <a:srgbClr val="166534"/>
+                  <a:srgbClr val="A5335F"/>
                 </a:solidFill>
                 <a:latin typeface="Verdana"/>
               </a:rPr>
@@ -10236,7 +10236,7 @@
             </a:avLst>
           </a:prstGeom>
           <a:solidFill>
-            <a:srgbClr val="E3F1E7"/>
+            <a:srgbClr val="FCE9F0"/>
           </a:solidFill>
           <a:ln>
             <a:noFill/>
@@ -10293,7 +10293,7 @@
             <a:r>
               <a:rPr sz="1500" b="1" i="0">
                 <a:solidFill>
-                  <a:srgbClr val="166534"/>
+                  <a:srgbClr val="A5335F"/>
                 </a:solidFill>
                 <a:latin typeface="Verdana"/>
               </a:rPr>
@@ -10413,7 +10413,7 @@
             </a:avLst>
           </a:prstGeom>
           <a:solidFill>
-            <a:srgbClr val="E3F1E7"/>
+            <a:srgbClr val="FCE9F0"/>
           </a:solidFill>
           <a:ln>
             <a:noFill/>
@@ -10470,7 +10470,7 @@
             <a:r>
               <a:rPr sz="1500" b="1" i="0">
                 <a:solidFill>
-                  <a:srgbClr val="166534"/>
+                  <a:srgbClr val="A5335F"/>
                 </a:solidFill>
                 <a:latin typeface="Verdana"/>
               </a:rPr>
@@ -10695,7 +10695,7 @@
             <a:r>
               <a:rPr sz="1300" b="1" i="0" spc="156">
                 <a:solidFill>
-                  <a:srgbClr val="166534"/>
+                  <a:srgbClr val="A5335F"/>
                 </a:solidFill>
                 <a:latin typeface="Verdana"/>
               </a:rPr>
@@ -10845,7 +10845,7 @@
             </a:avLst>
           </a:prstGeom>
           <a:solidFill>
-            <a:srgbClr val="E3F1E7"/>
+            <a:srgbClr val="FCE9F0"/>
           </a:solidFill>
           <a:ln>
             <a:noFill/>
@@ -10902,7 +10902,7 @@
             <a:r>
               <a:rPr sz="1500" b="1" i="0">
                 <a:solidFill>
-                  <a:srgbClr val="166534"/>
+                  <a:srgbClr val="A5335F"/>
                 </a:solidFill>
                 <a:latin typeface="Verdana"/>
               </a:rPr>
@@ -11013,7 +11013,7 @@
             </a:avLst>
           </a:prstGeom>
           <a:solidFill>
-            <a:srgbClr val="E3F1E7"/>
+            <a:srgbClr val="FCE9F0"/>
           </a:solidFill>
           <a:ln>
             <a:noFill/>
@@ -11070,7 +11070,7 @@
             <a:r>
               <a:rPr sz="1500" b="1" i="0">
                 <a:solidFill>
-                  <a:srgbClr val="166534"/>
+                  <a:srgbClr val="A5335F"/>
                 </a:solidFill>
                 <a:latin typeface="Verdana"/>
               </a:rPr>
@@ -11181,7 +11181,7 @@
             </a:avLst>
           </a:prstGeom>
           <a:solidFill>
-            <a:srgbClr val="E3F1E7"/>
+            <a:srgbClr val="FCE9F0"/>
           </a:solidFill>
           <a:ln>
             <a:noFill/>
@@ -11238,7 +11238,7 @@
             <a:r>
               <a:rPr sz="1500" b="1" i="0">
                 <a:solidFill>
-                  <a:srgbClr val="166534"/>
+                  <a:srgbClr val="A5335F"/>
                 </a:solidFill>
                 <a:latin typeface="Verdana"/>
               </a:rPr>
@@ -11349,7 +11349,7 @@
             </a:avLst>
           </a:prstGeom>
           <a:solidFill>
-            <a:srgbClr val="E3F1E7"/>
+            <a:srgbClr val="FCE9F0"/>
           </a:solidFill>
           <a:ln>
             <a:noFill/>
@@ -11406,7 +11406,7 @@
             <a:r>
               <a:rPr sz="1500" b="1" i="0">
                 <a:solidFill>
-                  <a:srgbClr val="166534"/>
+                  <a:srgbClr val="A5335F"/>
                 </a:solidFill>
                 <a:latin typeface="Verdana"/>
               </a:rPr>
@@ -11517,7 +11517,7 @@
             </a:avLst>
           </a:prstGeom>
           <a:solidFill>
-            <a:srgbClr val="E3F1E7"/>
+            <a:srgbClr val="FCE9F0"/>
           </a:solidFill>
           <a:ln>
             <a:noFill/>
@@ -11574,7 +11574,7 @@
             <a:r>
               <a:rPr sz="1500" b="1" i="0">
                 <a:solidFill>
-                  <a:srgbClr val="166534"/>
+                  <a:srgbClr val="A5335F"/>
                 </a:solidFill>
                 <a:latin typeface="Verdana"/>
               </a:rPr>
@@ -11790,7 +11790,7 @@
             <a:r>
               <a:rPr sz="1300" b="1" i="0" spc="156">
                 <a:solidFill>
-                  <a:srgbClr val="166534"/>
+                  <a:srgbClr val="A5335F"/>
                 </a:solidFill>
                 <a:latin typeface="Verdana"/>
               </a:rPr>
@@ -11940,7 +11940,7 @@
             </a:avLst>
           </a:prstGeom>
           <a:solidFill>
-            <a:srgbClr val="E3F1E7"/>
+            <a:srgbClr val="FCE9F0"/>
           </a:solidFill>
           <a:ln>
             <a:noFill/>
@@ -11997,7 +11997,7 @@
             <a:r>
               <a:rPr sz="1500" b="1" i="0">
                 <a:solidFill>
-                  <a:srgbClr val="166534"/>
+                  <a:srgbClr val="A5335F"/>
                 </a:solidFill>
                 <a:latin typeface="Verdana"/>
               </a:rPr>
@@ -12117,7 +12117,7 @@
             </a:avLst>
           </a:prstGeom>
           <a:solidFill>
-            <a:srgbClr val="E3F1E7"/>
+            <a:srgbClr val="FCE9F0"/>
           </a:solidFill>
           <a:ln>
             <a:noFill/>
@@ -12174,7 +12174,7 @@
             <a:r>
               <a:rPr sz="1500" b="1" i="0">
                 <a:solidFill>
-                  <a:srgbClr val="166534"/>
+                  <a:srgbClr val="A5335F"/>
                 </a:solidFill>
                 <a:latin typeface="Verdana"/>
               </a:rPr>
@@ -12294,7 +12294,7 @@
             </a:avLst>
           </a:prstGeom>
           <a:solidFill>
-            <a:srgbClr val="E3F1E7"/>
+            <a:srgbClr val="FCE9F0"/>
           </a:solidFill>
           <a:ln>
             <a:noFill/>
@@ -12351,7 +12351,7 @@
             <a:r>
               <a:rPr sz="1500" b="1" i="0">
                 <a:solidFill>
-                  <a:srgbClr val="166534"/>
+                  <a:srgbClr val="A5335F"/>
                 </a:solidFill>
                 <a:latin typeface="Verdana"/>
               </a:rPr>
@@ -12471,7 +12471,7 @@
             </a:avLst>
           </a:prstGeom>
           <a:solidFill>
-            <a:srgbClr val="E3F1E7"/>
+            <a:srgbClr val="FCE9F0"/>
           </a:solidFill>
           <a:ln>
             <a:noFill/>
@@ -12528,7 +12528,7 @@
             <a:r>
               <a:rPr sz="1500" b="1" i="0">
                 <a:solidFill>
-                  <a:srgbClr val="166534"/>
+                  <a:srgbClr val="A5335F"/>
                 </a:solidFill>
                 <a:latin typeface="Verdana"/>
               </a:rPr>
@@ -12648,7 +12648,7 @@
             </a:avLst>
           </a:prstGeom>
           <a:solidFill>
-            <a:srgbClr val="E3F1E7"/>
+            <a:srgbClr val="FCE9F0"/>
           </a:solidFill>
           <a:ln>
             <a:noFill/>
@@ -12705,7 +12705,7 @@
             <a:r>
               <a:rPr sz="1500" b="1" i="0">
                 <a:solidFill>
-                  <a:srgbClr val="166534"/>
+                  <a:srgbClr val="A5335F"/>
                 </a:solidFill>
                 <a:latin typeface="Verdana"/>
               </a:rPr>
@@ -13393,7 +13393,7 @@
             <a:r>
               <a:rPr sz="1300" b="1" i="0" spc="156">
                 <a:solidFill>
-                  <a:srgbClr val="166534"/>
+                  <a:srgbClr val="A5335F"/>
                 </a:solidFill>
                 <a:latin typeface="Verdana"/>
               </a:rPr>
@@ -13504,7 +13504,7 @@
             </a:avLst>
           </a:prstGeom>
           <a:solidFill>
-            <a:srgbClr val="E3F1E7"/>
+            <a:srgbClr val="FCE9F0"/>
           </a:solidFill>
           <a:ln>
             <a:noFill/>
@@ -13561,7 +13561,7 @@
             <a:r>
               <a:rPr sz="1500" b="1" i="0">
                 <a:solidFill>
-                  <a:srgbClr val="166534"/>
+                  <a:srgbClr val="A5335F"/>
                 </a:solidFill>
                 <a:latin typeface="Verdana"/>
               </a:rPr>
@@ -13672,7 +13672,7 @@
             </a:avLst>
           </a:prstGeom>
           <a:solidFill>
-            <a:srgbClr val="E3F1E7"/>
+            <a:srgbClr val="FCE9F0"/>
           </a:solidFill>
           <a:ln>
             <a:noFill/>
@@ -13729,7 +13729,7 @@
             <a:r>
               <a:rPr sz="1500" b="1" i="0">
                 <a:solidFill>
-                  <a:srgbClr val="166534"/>
+                  <a:srgbClr val="A5335F"/>
                 </a:solidFill>
                 <a:latin typeface="Verdana"/>
               </a:rPr>
@@ -13840,7 +13840,7 @@
             </a:avLst>
           </a:prstGeom>
           <a:solidFill>
-            <a:srgbClr val="E3F1E7"/>
+            <a:srgbClr val="FCE9F0"/>
           </a:solidFill>
           <a:ln>
             <a:noFill/>
@@ -13897,7 +13897,7 @@
             <a:r>
               <a:rPr sz="1500" b="1" i="0">
                 <a:solidFill>
-                  <a:srgbClr val="166534"/>
+                  <a:srgbClr val="A5335F"/>
                 </a:solidFill>
                 <a:latin typeface="Verdana"/>
               </a:rPr>
@@ -14008,7 +14008,7 @@
             </a:avLst>
           </a:prstGeom>
           <a:solidFill>
-            <a:srgbClr val="E3F1E7"/>
+            <a:srgbClr val="FCE9F0"/>
           </a:solidFill>
           <a:ln>
             <a:noFill/>
@@ -14065,7 +14065,7 @@
             <a:r>
               <a:rPr sz="1500" b="1" i="0">
                 <a:solidFill>
-                  <a:srgbClr val="166534"/>
+                  <a:srgbClr val="A5335F"/>
                 </a:solidFill>
                 <a:latin typeface="Verdana"/>
               </a:rPr>
@@ -14281,7 +14281,7 @@
             <a:r>
               <a:rPr sz="1300" b="1" i="0" spc="156">
                 <a:solidFill>
-                  <a:srgbClr val="166534"/>
+                  <a:srgbClr val="A5335F"/>
                 </a:solidFill>
                 <a:latin typeface="Verdana"/>
               </a:rPr>
@@ -14483,7 +14483,7 @@
             <a:r>
               <a:rPr sz="1800" b="1" i="0">
                 <a:solidFill>
-                  <a:srgbClr val="166534"/>
+                  <a:srgbClr val="A5335F"/>
                 </a:solidFill>
                 <a:latin typeface="Verdana"/>
               </a:rPr>
@@ -14603,7 +14603,7 @@
             <a:r>
               <a:rPr sz="1800" b="1" i="0">
                 <a:solidFill>
-                  <a:srgbClr val="166534"/>
+                  <a:srgbClr val="A5335F"/>
                 </a:solidFill>
                 <a:latin typeface="Verdana"/>
               </a:rPr>
@@ -14723,7 +14723,7 @@
             <a:r>
               <a:rPr sz="1800" b="1" i="0">
                 <a:solidFill>
-                  <a:srgbClr val="166534"/>
+                  <a:srgbClr val="A5335F"/>
                 </a:solidFill>
                 <a:latin typeface="Verdana"/>
               </a:rPr>
@@ -14843,7 +14843,7 @@
             <a:r>
               <a:rPr sz="1800" b="1" i="0">
                 <a:solidFill>
-                  <a:srgbClr val="166534"/>
+                  <a:srgbClr val="A5335F"/>
                 </a:solidFill>
                 <a:latin typeface="Verdana"/>
               </a:rPr>
@@ -14963,7 +14963,7 @@
             <a:r>
               <a:rPr sz="1800" b="1" i="0">
                 <a:solidFill>
-                  <a:srgbClr val="166534"/>
+                  <a:srgbClr val="A5335F"/>
                 </a:solidFill>
                 <a:latin typeface="Verdana"/>
               </a:rPr>
@@ -15083,7 +15083,7 @@
             <a:r>
               <a:rPr sz="1800" b="1" i="0">
                 <a:solidFill>
-                  <a:srgbClr val="166534"/>
+                  <a:srgbClr val="A5335F"/>
                 </a:solidFill>
                 <a:latin typeface="Verdana"/>
               </a:rPr>
@@ -15299,7 +15299,7 @@
             <a:r>
               <a:rPr sz="1300" b="1" i="0" spc="156">
                 <a:solidFill>
-                  <a:srgbClr val="166534"/>
+                  <a:srgbClr val="A5335F"/>
                 </a:solidFill>
                 <a:latin typeface="Verdana"/>
               </a:rPr>
@@ -15325,7 +15325,7 @@
             </a:avLst>
           </a:prstGeom>
           <a:solidFill>
-            <a:srgbClr val="E3F1E7"/>
+            <a:srgbClr val="FCE9F0"/>
           </a:solidFill>
           <a:ln w="12700">
             <a:solidFill>
@@ -15646,7 +15646,7 @@
             <a:r>
               <a:rPr sz="1300" b="1" i="0" spc="156">
                 <a:solidFill>
-                  <a:srgbClr val="166534"/>
+                  <a:srgbClr val="A5335F"/>
                 </a:solidFill>
                 <a:latin typeface="Verdana"/>
               </a:rPr>
@@ -15770,7 +15770,7 @@
             <a:r>
               <a:rPr sz="2200" b="1" i="0">
                 <a:solidFill>
-                  <a:srgbClr val="166534"/>
+                  <a:srgbClr val="A5335F"/>
                 </a:solidFill>
                 <a:latin typeface="Verdana"/>
               </a:rPr>
@@ -15894,7 +15894,7 @@
             <a:r>
               <a:rPr sz="2200" b="1" i="0">
                 <a:solidFill>
-                  <a:srgbClr val="166534"/>
+                  <a:srgbClr val="A5335F"/>
                 </a:solidFill>
                 <a:latin typeface="Verdana"/>
               </a:rPr>
@@ -16018,7 +16018,7 @@
             <a:r>
               <a:rPr sz="2200" b="1" i="0">
                 <a:solidFill>
-                  <a:srgbClr val="166534"/>
+                  <a:srgbClr val="A5335F"/>
                 </a:solidFill>
                 <a:latin typeface="Verdana"/>
               </a:rPr>
@@ -16142,7 +16142,7 @@
             <a:r>
               <a:rPr sz="2200" b="1" i="0">
                 <a:solidFill>
-                  <a:srgbClr val="166534"/>
+                  <a:srgbClr val="A5335F"/>
                 </a:solidFill>
                 <a:latin typeface="Verdana"/>
               </a:rPr>
@@ -16358,7 +16358,7 @@
             <a:r>
               <a:rPr sz="1300" b="1" i="0" spc="156">
                 <a:solidFill>
-                  <a:srgbClr val="166534"/>
+                  <a:srgbClr val="A5335F"/>
                 </a:solidFill>
                 <a:latin typeface="Verdana"/>
               </a:rPr>
@@ -17298,7 +17298,7 @@
             <a:r>
               <a:rPr sz="1300" b="1" i="0" spc="156">
                 <a:solidFill>
-                  <a:srgbClr val="166534"/>
+                  <a:srgbClr val="A5335F"/>
                 </a:solidFill>
                 <a:latin typeface="Verdana"/>
               </a:rPr>
@@ -18118,7 +18118,7 @@
             <a:r>
               <a:rPr sz="1300" b="1" i="0" spc="156">
                 <a:solidFill>
-                  <a:srgbClr val="166534"/>
+                  <a:srgbClr val="A5335F"/>
                 </a:solidFill>
                 <a:latin typeface="Verdana"/>
               </a:rPr>
@@ -18268,7 +18268,7 @@
             </a:avLst>
           </a:prstGeom>
           <a:solidFill>
-            <a:srgbClr val="E3F1E7"/>
+            <a:srgbClr val="FCE9F0"/>
           </a:solidFill>
           <a:ln>
             <a:noFill/>
@@ -18325,7 +18325,7 @@
             <a:r>
               <a:rPr sz="1500" b="1" i="0">
                 <a:solidFill>
-                  <a:srgbClr val="166534"/>
+                  <a:srgbClr val="A5335F"/>
                 </a:solidFill>
                 <a:latin typeface="Verdana"/>
               </a:rPr>
@@ -18436,7 +18436,7 @@
             </a:avLst>
           </a:prstGeom>
           <a:solidFill>
-            <a:srgbClr val="E3F1E7"/>
+            <a:srgbClr val="FCE9F0"/>
           </a:solidFill>
           <a:ln>
             <a:noFill/>
@@ -18493,7 +18493,7 @@
             <a:r>
               <a:rPr sz="1500" b="1" i="0">
                 <a:solidFill>
-                  <a:srgbClr val="166534"/>
+                  <a:srgbClr val="A5335F"/>
                 </a:solidFill>
                 <a:latin typeface="Verdana"/>
               </a:rPr>
@@ -18604,7 +18604,7 @@
             </a:avLst>
           </a:prstGeom>
           <a:solidFill>
-            <a:srgbClr val="E3F1E7"/>
+            <a:srgbClr val="FCE9F0"/>
           </a:solidFill>
           <a:ln>
             <a:noFill/>
@@ -18661,7 +18661,7 @@
             <a:r>
               <a:rPr sz="1500" b="1" i="0">
                 <a:solidFill>
-                  <a:srgbClr val="166534"/>
+                  <a:srgbClr val="A5335F"/>
                 </a:solidFill>
                 <a:latin typeface="Verdana"/>
               </a:rPr>
@@ -18772,7 +18772,7 @@
             </a:avLst>
           </a:prstGeom>
           <a:solidFill>
-            <a:srgbClr val="E3F1E7"/>
+            <a:srgbClr val="FCE9F0"/>
           </a:solidFill>
           <a:ln>
             <a:noFill/>
@@ -18829,7 +18829,7 @@
             <a:r>
               <a:rPr sz="1500" b="1" i="0">
                 <a:solidFill>
-                  <a:srgbClr val="166534"/>
+                  <a:srgbClr val="A5335F"/>
                 </a:solidFill>
                 <a:latin typeface="Verdana"/>
               </a:rPr>
@@ -18940,7 +18940,7 @@
             </a:avLst>
           </a:prstGeom>
           <a:solidFill>
-            <a:srgbClr val="E3F1E7"/>
+            <a:srgbClr val="FCE9F0"/>
           </a:solidFill>
           <a:ln>
             <a:noFill/>
@@ -18997,7 +18997,7 @@
             <a:r>
               <a:rPr sz="1500" b="1" i="0">
                 <a:solidFill>
-                  <a:srgbClr val="166534"/>
+                  <a:srgbClr val="A5335F"/>
                 </a:solidFill>
                 <a:latin typeface="Verdana"/>
               </a:rPr>
@@ -19213,7 +19213,7 @@
             <a:r>
               <a:rPr sz="1300" b="1" i="0" spc="156">
                 <a:solidFill>
-                  <a:srgbClr val="166534"/>
+                  <a:srgbClr val="A5335F"/>
                 </a:solidFill>
                 <a:latin typeface="Verdana"/>
               </a:rPr>
@@ -19363,7 +19363,7 @@
             </a:avLst>
           </a:prstGeom>
           <a:solidFill>
-            <a:srgbClr val="E3F1E7"/>
+            <a:srgbClr val="FCE9F0"/>
           </a:solidFill>
           <a:ln>
             <a:noFill/>
@@ -19420,7 +19420,7 @@
             <a:r>
               <a:rPr sz="1500" b="1" i="0">
                 <a:solidFill>
-                  <a:srgbClr val="166534"/>
+                  <a:srgbClr val="A5335F"/>
                 </a:solidFill>
                 <a:latin typeface="Verdana"/>
               </a:rPr>
@@ -19540,7 +19540,7 @@
             </a:avLst>
           </a:prstGeom>
           <a:solidFill>
-            <a:srgbClr val="E3F1E7"/>
+            <a:srgbClr val="FCE9F0"/>
           </a:solidFill>
           <a:ln>
             <a:noFill/>
@@ -19597,7 +19597,7 @@
             <a:r>
               <a:rPr sz="1500" b="1" i="0">
                 <a:solidFill>
-                  <a:srgbClr val="166534"/>
+                  <a:srgbClr val="A5335F"/>
                 </a:solidFill>
                 <a:latin typeface="Verdana"/>
               </a:rPr>
@@ -19717,7 +19717,7 @@
             </a:avLst>
           </a:prstGeom>
           <a:solidFill>
-            <a:srgbClr val="E3F1E7"/>
+            <a:srgbClr val="FCE9F0"/>
           </a:solidFill>
           <a:ln>
             <a:noFill/>
@@ -19774,7 +19774,7 @@
             <a:r>
               <a:rPr sz="1500" b="1" i="0">
                 <a:solidFill>
-                  <a:srgbClr val="166534"/>
+                  <a:srgbClr val="A5335F"/>
                 </a:solidFill>
                 <a:latin typeface="Verdana"/>
               </a:rPr>
@@ -19894,7 +19894,7 @@
             </a:avLst>
           </a:prstGeom>
           <a:solidFill>
-            <a:srgbClr val="E3F1E7"/>
+            <a:srgbClr val="FCE9F0"/>
           </a:solidFill>
           <a:ln>
             <a:noFill/>
@@ -19951,7 +19951,7 @@
             <a:r>
               <a:rPr sz="1500" b="1" i="0">
                 <a:solidFill>
-                  <a:srgbClr val="166534"/>
+                  <a:srgbClr val="A5335F"/>
                 </a:solidFill>
                 <a:latin typeface="Verdana"/>
               </a:rPr>
@@ -20071,7 +20071,7 @@
             </a:avLst>
           </a:prstGeom>
           <a:solidFill>
-            <a:srgbClr val="E3F1E7"/>
+            <a:srgbClr val="FCE9F0"/>
           </a:solidFill>
           <a:ln>
             <a:noFill/>
@@ -20128,7 +20128,7 @@
             <a:r>
               <a:rPr sz="1500" b="1" i="0">
                 <a:solidFill>
-                  <a:srgbClr val="166534"/>
+                  <a:srgbClr val="A5335F"/>
                 </a:solidFill>
                 <a:latin typeface="Verdana"/>
               </a:rPr>

--- a/assets/powerpoints/module-logement/C4-le-bail-et-le-1er-juillet.pptx
+++ b/assets/powerpoints/module-logement/C4-le-bail-et-le-1er-juillet.pptx
@@ -15650,7 +15650,7 @@
                 </a:solidFill>
                 <a:latin typeface="Verdana"/>
               </a:rPr>
-              <a:t>EN APPRENDRE PLUS</a:t>
+              <a:t>OUVRIR LA MINI-LEÇON</a:t>
             </a:r>
           </a:p>
         </p:txBody>
